--- a/CalendarioAgo26/presentaciones/14_POO.pptx
+++ b/CalendarioAgo26/presentaciones/14_POO.pptx
@@ -186,7 +186,7 @@
 <file path=ppt/revisionInfo.xml><?xml version="1.0" encoding="utf-8"?>
 <p1510:revInfo xmlns:a="http://schemas.openxmlformats.org/drawingml/2006/main" xmlns:r="http://schemas.openxmlformats.org/officeDocument/2006/relationships" xmlns:p1510="http://schemas.microsoft.com/office/powerpoint/2015/10/main">
   <p1510:revLst>
-    <p1510:client id="{0F29E0D4-8E88-4D76-AE39-EF909E2F5EE7}" v="3" dt="2025-08-29T16:41:23.982"/>
+    <p1510:client id="{5F417808-CC54-4F43-B4AE-B3869E4791C2}" v="1" dt="2026-08-11T16:25:03.158"/>
   </p1510:revLst>
 </p1510:revInfo>
 </file>
@@ -196,221 +196,25 @@
   <pc:docChgLst>
     <pc:chgData name="Lizethe Pérez Fuertes" userId="4ae9ef87-2a7d-42f8-8dfa-0a501a9e2ff4" providerId="ADAL" clId="{FDDD45CB-1330-4033-A842-3D2746AFF7C7}"/>
     <pc:docChg chg="undo custSel addSld delSld modSld">
-      <pc:chgData name="Lizethe Pérez Fuertes" userId="4ae9ef87-2a7d-42f8-8dfa-0a501a9e2ff4" providerId="ADAL" clId="{FDDD45CB-1330-4033-A842-3D2746AFF7C7}" dt="2025-08-29T16:41:23.962" v="5"/>
+      <pc:chgData name="Lizethe Pérez Fuertes" userId="4ae9ef87-2a7d-42f8-8dfa-0a501a9e2ff4" providerId="ADAL" clId="{FDDD45CB-1330-4033-A842-3D2746AFF7C7}" dt="2026-08-11T16:25:03.156" v="6"/>
       <pc:docMkLst>
         <pc:docMk/>
       </pc:docMkLst>
-      <pc:sldChg chg="add del">
-        <pc:chgData name="Lizethe Pérez Fuertes" userId="4ae9ef87-2a7d-42f8-8dfa-0a501a9e2ff4" providerId="ADAL" clId="{FDDD45CB-1330-4033-A842-3D2746AFF7C7}" dt="2025-08-29T16:41:21.652" v="4" actId="47"/>
+      <pc:sldChg chg="modSp">
+        <pc:chgData name="Lizethe Pérez Fuertes" userId="4ae9ef87-2a7d-42f8-8dfa-0a501a9e2ff4" providerId="ADAL" clId="{FDDD45CB-1330-4033-A842-3D2746AFF7C7}" dt="2026-08-11T16:25:03.156" v="6"/>
         <pc:sldMkLst>
           <pc:docMk/>
-          <pc:sldMk cId="0" sldId="282"/>
+          <pc:sldMk cId="542782376" sldId="293"/>
         </pc:sldMkLst>
+        <pc:spChg chg="mod">
+          <ac:chgData name="Lizethe Pérez Fuertes" userId="4ae9ef87-2a7d-42f8-8dfa-0a501a9e2ff4" providerId="ADAL" clId="{FDDD45CB-1330-4033-A842-3D2746AFF7C7}" dt="2026-08-11T16:25:03.156" v="6"/>
+          <ac:spMkLst>
+            <pc:docMk/>
+            <pc:sldMk cId="542782376" sldId="293"/>
+            <ac:spMk id="2" creationId="{00000000-0000-0000-0000-000000000000}"/>
+          </ac:spMkLst>
+        </pc:spChg>
       </pc:sldChg>
-      <pc:sldChg chg="add del">
-        <pc:chgData name="Lizethe Pérez Fuertes" userId="4ae9ef87-2a7d-42f8-8dfa-0a501a9e2ff4" providerId="ADAL" clId="{FDDD45CB-1330-4033-A842-3D2746AFF7C7}" dt="2025-08-29T16:41:21.652" v="4" actId="47"/>
-        <pc:sldMkLst>
-          <pc:docMk/>
-          <pc:sldMk cId="2025924933" sldId="571"/>
-        </pc:sldMkLst>
-      </pc:sldChg>
-      <pc:sldChg chg="add del">
-        <pc:chgData name="Lizethe Pérez Fuertes" userId="4ae9ef87-2a7d-42f8-8dfa-0a501a9e2ff4" providerId="ADAL" clId="{FDDD45CB-1330-4033-A842-3D2746AFF7C7}" dt="2025-08-29T16:41:21.652" v="4" actId="47"/>
-        <pc:sldMkLst>
-          <pc:docMk/>
-          <pc:sldMk cId="3946658930" sldId="572"/>
-        </pc:sldMkLst>
-      </pc:sldChg>
-      <pc:sldChg chg="add del">
-        <pc:chgData name="Lizethe Pérez Fuertes" userId="4ae9ef87-2a7d-42f8-8dfa-0a501a9e2ff4" providerId="ADAL" clId="{FDDD45CB-1330-4033-A842-3D2746AFF7C7}" dt="2025-08-29T16:41:21.652" v="4" actId="47"/>
-        <pc:sldMkLst>
-          <pc:docMk/>
-          <pc:sldMk cId="1227542179" sldId="573"/>
-        </pc:sldMkLst>
-      </pc:sldChg>
-      <pc:sldChg chg="add del">
-        <pc:chgData name="Lizethe Pérez Fuertes" userId="4ae9ef87-2a7d-42f8-8dfa-0a501a9e2ff4" providerId="ADAL" clId="{FDDD45CB-1330-4033-A842-3D2746AFF7C7}" dt="2025-08-29T16:41:21.652" v="4" actId="47"/>
-        <pc:sldMkLst>
-          <pc:docMk/>
-          <pc:sldMk cId="3285934696" sldId="576"/>
-        </pc:sldMkLst>
-      </pc:sldChg>
-      <pc:sldChg chg="add del">
-        <pc:chgData name="Lizethe Pérez Fuertes" userId="4ae9ef87-2a7d-42f8-8dfa-0a501a9e2ff4" providerId="ADAL" clId="{FDDD45CB-1330-4033-A842-3D2746AFF7C7}" dt="2025-08-29T16:41:21.652" v="4" actId="47"/>
-        <pc:sldMkLst>
-          <pc:docMk/>
-          <pc:sldMk cId="1685158566" sldId="577"/>
-        </pc:sldMkLst>
-      </pc:sldChg>
-      <pc:sldChg chg="add del">
-        <pc:chgData name="Lizethe Pérez Fuertes" userId="4ae9ef87-2a7d-42f8-8dfa-0a501a9e2ff4" providerId="ADAL" clId="{FDDD45CB-1330-4033-A842-3D2746AFF7C7}" dt="2025-08-29T16:41:21.652" v="4" actId="47"/>
-        <pc:sldMkLst>
-          <pc:docMk/>
-          <pc:sldMk cId="2989575408" sldId="579"/>
-        </pc:sldMkLst>
-      </pc:sldChg>
-      <pc:sldChg chg="add del">
-        <pc:chgData name="Lizethe Pérez Fuertes" userId="4ae9ef87-2a7d-42f8-8dfa-0a501a9e2ff4" providerId="ADAL" clId="{FDDD45CB-1330-4033-A842-3D2746AFF7C7}" dt="2025-08-29T16:41:21.652" v="4" actId="47"/>
-        <pc:sldMkLst>
-          <pc:docMk/>
-          <pc:sldMk cId="2251645235" sldId="580"/>
-        </pc:sldMkLst>
-      </pc:sldChg>
-      <pc:sldChg chg="add del">
-        <pc:chgData name="Lizethe Pérez Fuertes" userId="4ae9ef87-2a7d-42f8-8dfa-0a501a9e2ff4" providerId="ADAL" clId="{FDDD45CB-1330-4033-A842-3D2746AFF7C7}" dt="2025-08-29T16:41:21.652" v="4" actId="47"/>
-        <pc:sldMkLst>
-          <pc:docMk/>
-          <pc:sldMk cId="2121315118" sldId="581"/>
-        </pc:sldMkLst>
-      </pc:sldChg>
-      <pc:sldChg chg="add del">
-        <pc:chgData name="Lizethe Pérez Fuertes" userId="4ae9ef87-2a7d-42f8-8dfa-0a501a9e2ff4" providerId="ADAL" clId="{FDDD45CB-1330-4033-A842-3D2746AFF7C7}" dt="2025-08-29T16:41:21.652" v="4" actId="47"/>
-        <pc:sldMkLst>
-          <pc:docMk/>
-          <pc:sldMk cId="1948161739" sldId="583"/>
-        </pc:sldMkLst>
-      </pc:sldChg>
-      <pc:sldChg chg="add del">
-        <pc:chgData name="Lizethe Pérez Fuertes" userId="4ae9ef87-2a7d-42f8-8dfa-0a501a9e2ff4" providerId="ADAL" clId="{FDDD45CB-1330-4033-A842-3D2746AFF7C7}" dt="2025-08-29T16:41:21.652" v="4" actId="47"/>
-        <pc:sldMkLst>
-          <pc:docMk/>
-          <pc:sldMk cId="1517661690" sldId="584"/>
-        </pc:sldMkLst>
-      </pc:sldChg>
-      <pc:sldChg chg="add del">
-        <pc:chgData name="Lizethe Pérez Fuertes" userId="4ae9ef87-2a7d-42f8-8dfa-0a501a9e2ff4" providerId="ADAL" clId="{FDDD45CB-1330-4033-A842-3D2746AFF7C7}" dt="2025-08-29T16:41:21.652" v="4" actId="47"/>
-        <pc:sldMkLst>
-          <pc:docMk/>
-          <pc:sldMk cId="173049240" sldId="586"/>
-        </pc:sldMkLst>
-      </pc:sldChg>
-      <pc:sldChg chg="add del">
-        <pc:chgData name="Lizethe Pérez Fuertes" userId="4ae9ef87-2a7d-42f8-8dfa-0a501a9e2ff4" providerId="ADAL" clId="{FDDD45CB-1330-4033-A842-3D2746AFF7C7}" dt="2025-08-29T16:41:13.665" v="3" actId="47"/>
-        <pc:sldMkLst>
-          <pc:docMk/>
-          <pc:sldMk cId="2170577136" sldId="668"/>
-        </pc:sldMkLst>
-      </pc:sldChg>
-      <pc:sldChg chg="add del">
-        <pc:chgData name="Lizethe Pérez Fuertes" userId="4ae9ef87-2a7d-42f8-8dfa-0a501a9e2ff4" providerId="ADAL" clId="{FDDD45CB-1330-4033-A842-3D2746AFF7C7}" dt="2025-08-29T16:41:21.652" v="4" actId="47"/>
-        <pc:sldMkLst>
-          <pc:docMk/>
-          <pc:sldMk cId="699657367" sldId="671"/>
-        </pc:sldMkLst>
-      </pc:sldChg>
-      <pc:sldChg chg="add del">
-        <pc:chgData name="Lizethe Pérez Fuertes" userId="4ae9ef87-2a7d-42f8-8dfa-0a501a9e2ff4" providerId="ADAL" clId="{FDDD45CB-1330-4033-A842-3D2746AFF7C7}" dt="2025-08-29T16:41:23.962" v="5"/>
-        <pc:sldMkLst>
-          <pc:docMk/>
-          <pc:sldMk cId="358889480" sldId="673"/>
-        </pc:sldMkLst>
-      </pc:sldChg>
-      <pc:sldChg chg="add del">
-        <pc:chgData name="Lizethe Pérez Fuertes" userId="4ae9ef87-2a7d-42f8-8dfa-0a501a9e2ff4" providerId="ADAL" clId="{FDDD45CB-1330-4033-A842-3D2746AFF7C7}" dt="2025-08-29T16:41:23.962" v="5"/>
-        <pc:sldMkLst>
-          <pc:docMk/>
-          <pc:sldMk cId="290636224" sldId="674"/>
-        </pc:sldMkLst>
-      </pc:sldChg>
-      <pc:sldChg chg="add del">
-        <pc:chgData name="Lizethe Pérez Fuertes" userId="4ae9ef87-2a7d-42f8-8dfa-0a501a9e2ff4" providerId="ADAL" clId="{FDDD45CB-1330-4033-A842-3D2746AFF7C7}" dt="2025-08-29T16:41:23.962" v="5"/>
-        <pc:sldMkLst>
-          <pc:docMk/>
-          <pc:sldMk cId="2327857030" sldId="675"/>
-        </pc:sldMkLst>
-      </pc:sldChg>
-      <pc:sldChg chg="add del">
-        <pc:chgData name="Lizethe Pérez Fuertes" userId="4ae9ef87-2a7d-42f8-8dfa-0a501a9e2ff4" providerId="ADAL" clId="{FDDD45CB-1330-4033-A842-3D2746AFF7C7}" dt="2025-08-29T16:41:23.962" v="5"/>
-        <pc:sldMkLst>
-          <pc:docMk/>
-          <pc:sldMk cId="109054117" sldId="676"/>
-        </pc:sldMkLst>
-      </pc:sldChg>
-      <pc:sldChg chg="add del">
-        <pc:chgData name="Lizethe Pérez Fuertes" userId="4ae9ef87-2a7d-42f8-8dfa-0a501a9e2ff4" providerId="ADAL" clId="{FDDD45CB-1330-4033-A842-3D2746AFF7C7}" dt="2025-08-29T16:41:23.962" v="5"/>
-        <pc:sldMkLst>
-          <pc:docMk/>
-          <pc:sldMk cId="1681350111" sldId="677"/>
-        </pc:sldMkLst>
-      </pc:sldChg>
-      <pc:sldChg chg="add del">
-        <pc:chgData name="Lizethe Pérez Fuertes" userId="4ae9ef87-2a7d-42f8-8dfa-0a501a9e2ff4" providerId="ADAL" clId="{FDDD45CB-1330-4033-A842-3D2746AFF7C7}" dt="2025-08-29T16:41:23.962" v="5"/>
-        <pc:sldMkLst>
-          <pc:docMk/>
-          <pc:sldMk cId="624747281" sldId="678"/>
-        </pc:sldMkLst>
-      </pc:sldChg>
-      <pc:sldChg chg="add del">
-        <pc:chgData name="Lizethe Pérez Fuertes" userId="4ae9ef87-2a7d-42f8-8dfa-0a501a9e2ff4" providerId="ADAL" clId="{FDDD45CB-1330-4033-A842-3D2746AFF7C7}" dt="2025-08-29T16:41:23.962" v="5"/>
-        <pc:sldMkLst>
-          <pc:docMk/>
-          <pc:sldMk cId="1660404791" sldId="679"/>
-        </pc:sldMkLst>
-      </pc:sldChg>
-      <pc:sldChg chg="add del">
-        <pc:chgData name="Lizethe Pérez Fuertes" userId="4ae9ef87-2a7d-42f8-8dfa-0a501a9e2ff4" providerId="ADAL" clId="{FDDD45CB-1330-4033-A842-3D2746AFF7C7}" dt="2025-08-29T16:41:23.962" v="5"/>
-        <pc:sldMkLst>
-          <pc:docMk/>
-          <pc:sldMk cId="347609087" sldId="680"/>
-        </pc:sldMkLst>
-      </pc:sldChg>
-      <pc:sldChg chg="add del">
-        <pc:chgData name="Lizethe Pérez Fuertes" userId="4ae9ef87-2a7d-42f8-8dfa-0a501a9e2ff4" providerId="ADAL" clId="{FDDD45CB-1330-4033-A842-3D2746AFF7C7}" dt="2025-08-29T16:41:23.962" v="5"/>
-        <pc:sldMkLst>
-          <pc:docMk/>
-          <pc:sldMk cId="1369060848" sldId="681"/>
-        </pc:sldMkLst>
-      </pc:sldChg>
-      <pc:sldChg chg="add del">
-        <pc:chgData name="Lizethe Pérez Fuertes" userId="4ae9ef87-2a7d-42f8-8dfa-0a501a9e2ff4" providerId="ADAL" clId="{FDDD45CB-1330-4033-A842-3D2746AFF7C7}" dt="2025-08-29T16:41:23.962" v="5"/>
-        <pc:sldMkLst>
-          <pc:docMk/>
-          <pc:sldMk cId="594770524" sldId="682"/>
-        </pc:sldMkLst>
-      </pc:sldChg>
-      <pc:sldChg chg="add del">
-        <pc:chgData name="Lizethe Pérez Fuertes" userId="4ae9ef87-2a7d-42f8-8dfa-0a501a9e2ff4" providerId="ADAL" clId="{FDDD45CB-1330-4033-A842-3D2746AFF7C7}" dt="2025-08-29T16:41:23.962" v="5"/>
-        <pc:sldMkLst>
-          <pc:docMk/>
-          <pc:sldMk cId="77490221" sldId="683"/>
-        </pc:sldMkLst>
-      </pc:sldChg>
-      <pc:sldChg chg="add del">
-        <pc:chgData name="Lizethe Pérez Fuertes" userId="4ae9ef87-2a7d-42f8-8dfa-0a501a9e2ff4" providerId="ADAL" clId="{FDDD45CB-1330-4033-A842-3D2746AFF7C7}" dt="2025-08-29T16:41:23.962" v="5"/>
-        <pc:sldMkLst>
-          <pc:docMk/>
-          <pc:sldMk cId="3145197380" sldId="684"/>
-        </pc:sldMkLst>
-      </pc:sldChg>
-      <pc:sldChg chg="add del">
-        <pc:chgData name="Lizethe Pérez Fuertes" userId="4ae9ef87-2a7d-42f8-8dfa-0a501a9e2ff4" providerId="ADAL" clId="{FDDD45CB-1330-4033-A842-3D2746AFF7C7}" dt="2025-08-29T16:41:23.962" v="5"/>
-        <pc:sldMkLst>
-          <pc:docMk/>
-          <pc:sldMk cId="0" sldId="685"/>
-        </pc:sldMkLst>
-      </pc:sldChg>
-      <pc:sldChg chg="add del">
-        <pc:chgData name="Lizethe Pérez Fuertes" userId="4ae9ef87-2a7d-42f8-8dfa-0a501a9e2ff4" providerId="ADAL" clId="{FDDD45CB-1330-4033-A842-3D2746AFF7C7}" dt="2025-08-29T16:41:23.962" v="5"/>
-        <pc:sldMkLst>
-          <pc:docMk/>
-          <pc:sldMk cId="1529927900" sldId="686"/>
-        </pc:sldMkLst>
-      </pc:sldChg>
-      <pc:sldMasterChg chg="addSldLayout delSldLayout">
-        <pc:chgData name="Lizethe Pérez Fuertes" userId="4ae9ef87-2a7d-42f8-8dfa-0a501a9e2ff4" providerId="ADAL" clId="{FDDD45CB-1330-4033-A842-3D2746AFF7C7}" dt="2025-08-29T16:41:21.652" v="4" actId="47"/>
-        <pc:sldMasterMkLst>
-          <pc:docMk/>
-          <pc:sldMasterMk cId="2264661585" sldId="2147483648"/>
-        </pc:sldMasterMkLst>
-        <pc:sldLayoutChg chg="add del">
-          <pc:chgData name="Lizethe Pérez Fuertes" userId="4ae9ef87-2a7d-42f8-8dfa-0a501a9e2ff4" providerId="ADAL" clId="{FDDD45CB-1330-4033-A842-3D2746AFF7C7}" dt="2025-08-29T16:41:21.652" v="4" actId="47"/>
-          <pc:sldLayoutMkLst>
-            <pc:docMk/>
-            <pc:sldMasterMk cId="2264661585" sldId="2147483648"/>
-            <pc:sldLayoutMk cId="1335315867" sldId="2147483660"/>
-          </pc:sldLayoutMkLst>
-        </pc:sldLayoutChg>
-      </pc:sldMasterChg>
     </pc:docChg>
   </pc:docChgLst>
 </pc:chgInfo>
@@ -498,7 +302,7 @@
           <a:p>
             <a:fld id="{DDE721D5-655F-45D2-B717-3C4CD78C8568}" type="datetimeFigureOut">
               <a:rPr lang="es-MX" smtClean="0"/>
-              <a:t>28/08/2025</a:t>
+              <a:t>11/08/2026</a:t>
             </a:fld>
             <a:endParaRPr lang="es-MX" dirty="0"/>
           </a:p>
@@ -1417,7 +1221,7 @@
           <a:p>
             <a:fld id="{B3F3E716-CACC-4490-AD07-F24B6A68DE47}" type="datetimeFigureOut">
               <a:rPr lang="es-MX" smtClean="0"/>
-              <a:t>28/08/2025</a:t>
+              <a:t>11/08/2026</a:t>
             </a:fld>
             <a:endParaRPr lang="es-MX" dirty="0"/>
           </a:p>
@@ -1587,7 +1391,7 @@
           <a:p>
             <a:fld id="{B3F3E716-CACC-4490-AD07-F24B6A68DE47}" type="datetimeFigureOut">
               <a:rPr lang="es-MX" smtClean="0"/>
-              <a:t>28/08/2025</a:t>
+              <a:t>11/08/2026</a:t>
             </a:fld>
             <a:endParaRPr lang="es-MX" dirty="0"/>
           </a:p>
@@ -1767,7 +1571,7 @@
           <a:p>
             <a:fld id="{B3F3E716-CACC-4490-AD07-F24B6A68DE47}" type="datetimeFigureOut">
               <a:rPr lang="es-MX" smtClean="0"/>
-              <a:t>28/08/2025</a:t>
+              <a:t>11/08/2026</a:t>
             </a:fld>
             <a:endParaRPr lang="es-MX" dirty="0"/>
           </a:p>
@@ -2217,7 +2021,7 @@
           <a:p>
             <a:fld id="{1D8BD707-D9CF-40AE-B4C6-C98DA3205C09}" type="datetimeFigureOut">
               <a:rPr lang="en-US" smtClean="0"/>
-              <a:t>8/29/2025</a:t>
+              <a:t>8/11/2026</a:t>
             </a:fld>
             <a:endParaRPr lang="en-US" dirty="0"/>
           </a:p>
@@ -2377,7 +2181,7 @@
           <a:p>
             <a:fld id="{B3F3E716-CACC-4490-AD07-F24B6A68DE47}" type="datetimeFigureOut">
               <a:rPr lang="es-MX" smtClean="0"/>
-              <a:t>28/08/2025</a:t>
+              <a:t>11/08/2026</a:t>
             </a:fld>
             <a:endParaRPr lang="es-MX" dirty="0"/>
           </a:p>
@@ -2623,7 +2427,7 @@
           <a:p>
             <a:fld id="{B3F3E716-CACC-4490-AD07-F24B6A68DE47}" type="datetimeFigureOut">
               <a:rPr lang="es-MX" smtClean="0"/>
-              <a:t>28/08/2025</a:t>
+              <a:t>11/08/2026</a:t>
             </a:fld>
             <a:endParaRPr lang="es-MX" dirty="0"/>
           </a:p>
@@ -2911,7 +2715,7 @@
           <a:p>
             <a:fld id="{B3F3E716-CACC-4490-AD07-F24B6A68DE47}" type="datetimeFigureOut">
               <a:rPr lang="es-MX" smtClean="0"/>
-              <a:t>28/08/2025</a:t>
+              <a:t>11/08/2026</a:t>
             </a:fld>
             <a:endParaRPr lang="es-MX" dirty="0"/>
           </a:p>
@@ -3333,7 +3137,7 @@
           <a:p>
             <a:fld id="{B3F3E716-CACC-4490-AD07-F24B6A68DE47}" type="datetimeFigureOut">
               <a:rPr lang="es-MX" smtClean="0"/>
-              <a:t>28/08/2025</a:t>
+              <a:t>11/08/2026</a:t>
             </a:fld>
             <a:endParaRPr lang="es-MX" dirty="0"/>
           </a:p>
@@ -3451,7 +3255,7 @@
           <a:p>
             <a:fld id="{B3F3E716-CACC-4490-AD07-F24B6A68DE47}" type="datetimeFigureOut">
               <a:rPr lang="es-MX" smtClean="0"/>
-              <a:t>28/08/2025</a:t>
+              <a:t>11/08/2026</a:t>
             </a:fld>
             <a:endParaRPr lang="es-MX" dirty="0"/>
           </a:p>
@@ -3546,7 +3350,7 @@
           <a:p>
             <a:fld id="{B3F3E716-CACC-4490-AD07-F24B6A68DE47}" type="datetimeFigureOut">
               <a:rPr lang="es-MX" smtClean="0"/>
-              <a:t>28/08/2025</a:t>
+              <a:t>11/08/2026</a:t>
             </a:fld>
             <a:endParaRPr lang="es-MX" dirty="0"/>
           </a:p>
@@ -3823,7 +3627,7 @@
           <a:p>
             <a:fld id="{B3F3E716-CACC-4490-AD07-F24B6A68DE47}" type="datetimeFigureOut">
               <a:rPr lang="es-MX" smtClean="0"/>
-              <a:t>28/08/2025</a:t>
+              <a:t>11/08/2026</a:t>
             </a:fld>
             <a:endParaRPr lang="es-MX" dirty="0"/>
           </a:p>
@@ -4076,7 +3880,7 @@
           <a:p>
             <a:fld id="{B3F3E716-CACC-4490-AD07-F24B6A68DE47}" type="datetimeFigureOut">
               <a:rPr lang="es-MX" smtClean="0"/>
-              <a:t>28/08/2025</a:t>
+              <a:t>11/08/2026</a:t>
             </a:fld>
             <a:endParaRPr lang="es-MX" dirty="0"/>
           </a:p>
@@ -4289,7 +4093,7 @@
           <a:p>
             <a:fld id="{B3F3E716-CACC-4490-AD07-F24B6A68DE47}" type="datetimeFigureOut">
               <a:rPr lang="es-MX" smtClean="0"/>
-              <a:t>28/08/2025</a:t>
+              <a:t>11/08/2026</a:t>
             </a:fld>
             <a:endParaRPr lang="es-MX" dirty="0"/>
           </a:p>
@@ -4688,21 +4492,18 @@
           </a:bodyPr>
           <a:lstStyle/>
           <a:p>
-            <a:pPr algn="l" eaLnBrk="1" fontAlgn="auto" hangingPunct="1">
-              <a:spcAft>
-                <a:spcPts val="0"/>
-              </a:spcAft>
+            <a:pPr algn="l">
               <a:defRPr/>
             </a:pPr>
             <a:r>
-              <a:rPr lang="es-MX" sz="3200" dirty="0">
+              <a:rPr lang="es-MX" sz="3200">
                 <a:solidFill>
                   <a:schemeClr val="bg2">
                     <a:lumMod val="50000"/>
                   </a:schemeClr>
                 </a:solidFill>
               </a:rPr>
-              <a:t>TI 3001 C</a:t>
+              <a:t>TI 3008 C</a:t>
             </a:r>
             <a:br>
               <a:rPr lang="es-MX" sz="3200" dirty="0">
